--- a/Pharhad_Road_Manual.pptx
+++ b/Pharhad_Road_Manual.pptx
@@ -315,7 +315,7 @@
           <a:p>
             <a:fld id="{5BCAD085-E8A6-8845-BD4E-CB4CCA059FC4}" type="datetimeFigureOut">
               <a:rPr lang="en-US" smtClean="0"/>
-              <a:t>5/18/2026</a:t>
+              <a:t>5/19/2026</a:t>
             </a:fld>
             <a:endParaRPr lang="en-US"/>
           </a:p>
@@ -483,7 +483,7 @@
           <a:p>
             <a:fld id="{5BCAD085-E8A6-8845-BD4E-CB4CCA059FC4}" type="datetimeFigureOut">
               <a:rPr lang="en-US" smtClean="0"/>
-              <a:t>5/18/2026</a:t>
+              <a:t>5/19/2026</a:t>
             </a:fld>
             <a:endParaRPr lang="en-US"/>
           </a:p>
@@ -661,7 +661,7 @@
           <a:p>
             <a:fld id="{5BCAD085-E8A6-8845-BD4E-CB4CCA059FC4}" type="datetimeFigureOut">
               <a:rPr lang="en-US" smtClean="0"/>
-              <a:t>5/18/2026</a:t>
+              <a:t>5/19/2026</a:t>
             </a:fld>
             <a:endParaRPr lang="en-US"/>
           </a:p>
@@ -829,7 +829,7 @@
           <a:p>
             <a:fld id="{5BCAD085-E8A6-8845-BD4E-CB4CCA059FC4}" type="datetimeFigureOut">
               <a:rPr lang="en-US" smtClean="0"/>
-              <a:t>5/18/2026</a:t>
+              <a:t>5/19/2026</a:t>
             </a:fld>
             <a:endParaRPr lang="en-US"/>
           </a:p>
@@ -1074,7 +1074,7 @@
           <a:p>
             <a:fld id="{5BCAD085-E8A6-8845-BD4E-CB4CCA059FC4}" type="datetimeFigureOut">
               <a:rPr lang="en-US" smtClean="0"/>
-              <a:t>5/18/2026</a:t>
+              <a:t>5/19/2026</a:t>
             </a:fld>
             <a:endParaRPr lang="en-US"/>
           </a:p>
@@ -1359,7 +1359,7 @@
           <a:p>
             <a:fld id="{5BCAD085-E8A6-8845-BD4E-CB4CCA059FC4}" type="datetimeFigureOut">
               <a:rPr lang="en-US" smtClean="0"/>
-              <a:t>5/18/2026</a:t>
+              <a:t>5/19/2026</a:t>
             </a:fld>
             <a:endParaRPr lang="en-US"/>
           </a:p>
@@ -1778,7 +1778,7 @@
           <a:p>
             <a:fld id="{5BCAD085-E8A6-8845-BD4E-CB4CCA059FC4}" type="datetimeFigureOut">
               <a:rPr lang="en-US" smtClean="0"/>
-              <a:t>5/18/2026</a:t>
+              <a:t>5/19/2026</a:t>
             </a:fld>
             <a:endParaRPr lang="en-US"/>
           </a:p>
@@ -1895,7 +1895,7 @@
           <a:p>
             <a:fld id="{5BCAD085-E8A6-8845-BD4E-CB4CCA059FC4}" type="datetimeFigureOut">
               <a:rPr lang="en-US" smtClean="0"/>
-              <a:t>5/18/2026</a:t>
+              <a:t>5/19/2026</a:t>
             </a:fld>
             <a:endParaRPr lang="en-US"/>
           </a:p>
@@ -1990,7 +1990,7 @@
           <a:p>
             <a:fld id="{5BCAD085-E8A6-8845-BD4E-CB4CCA059FC4}" type="datetimeFigureOut">
               <a:rPr lang="en-US" smtClean="0"/>
-              <a:t>5/18/2026</a:t>
+              <a:t>5/19/2026</a:t>
             </a:fld>
             <a:endParaRPr lang="en-US"/>
           </a:p>
@@ -2265,7 +2265,7 @@
           <a:p>
             <a:fld id="{5BCAD085-E8A6-8845-BD4E-CB4CCA059FC4}" type="datetimeFigureOut">
               <a:rPr lang="en-US" smtClean="0"/>
-              <a:t>5/18/2026</a:t>
+              <a:t>5/19/2026</a:t>
             </a:fld>
             <a:endParaRPr lang="en-US"/>
           </a:p>
@@ -2517,7 +2517,7 @@
           <a:p>
             <a:fld id="{5BCAD085-E8A6-8845-BD4E-CB4CCA059FC4}" type="datetimeFigureOut">
               <a:rPr lang="en-US" smtClean="0"/>
-              <a:t>5/18/2026</a:t>
+              <a:t>5/19/2026</a:t>
             </a:fld>
             <a:endParaRPr lang="en-US"/>
           </a:p>
@@ -2728,7 +2728,7 @@
           <a:p>
             <a:fld id="{5BCAD085-E8A6-8845-BD4E-CB4CCA059FC4}" type="datetimeFigureOut">
               <a:rPr lang="en-US" smtClean="0"/>
-              <a:t>5/18/2026</a:t>
+              <a:t>5/19/2026</a:t>
             </a:fld>
             <a:endParaRPr lang="en-US"/>
           </a:p>
@@ -3415,6 +3415,36 @@
           <a:xfrm>
             <a:off x="1582934" y="6256887"/>
             <a:ext cx="8538451" cy="404627"/>
+          </a:xfrm>
+          <a:prstGeom prst="rect">
+            <a:avLst/>
+          </a:prstGeom>
+        </p:spPr>
+      </p:pic>
+      <p:pic>
+        <p:nvPicPr>
+          <p:cNvPr id="11" name="Picture 10">
+            <a:extLst>
+              <a:ext uri="{FF2B5EF4-FFF2-40B4-BE49-F238E27FC236}">
+                <a16:creationId xmlns:a16="http://schemas.microsoft.com/office/drawing/2014/main" id="{832C2C54-4E3A-A180-D626-378791C0A3E4}"/>
+              </a:ext>
+            </a:extLst>
+          </p:cNvPr>
+          <p:cNvPicPr>
+            <a:picLocks noChangeAspect="1"/>
+          </p:cNvPicPr>
+          <p:nvPr/>
+        </p:nvPicPr>
+        <p:blipFill>
+          <a:blip r:embed="rId4"/>
+          <a:stretch>
+            <a:fillRect/>
+          </a:stretch>
+        </p:blipFill>
+        <p:spPr>
+          <a:xfrm>
+            <a:off x="6400416" y="488773"/>
+            <a:ext cx="5487166" cy="3086531"/>
           </a:xfrm>
           <a:prstGeom prst="rect">
             <a:avLst/>
